--- a/decks/hist-somme/hist-somme_ch6_interpretations.pptx
+++ b/decks/hist-somme/hist-somme_ch6_interpretations.pptx
@@ -129,30 +129,30 @@
   <p:extLst>
     <p:ext uri="{521415D9-36F7-43E2-AB2F-B90AF26B5E84}">
       <p14:sectionLst xmlns:p14="http://schemas.microsoft.com/office/powerpoint/2010/main">
-        <p14:section name="Opening" id="{24619bb0-f26e-4a5e-44e2-d68e798b6d9c}">
+        <p14:section name="Opening" id="{52f708aa-d536-1db2-dc67-c9f639279e89}">
           <p14:sldIdLst>
             <p14:sldId id="256"/>
           </p14:sldIdLst>
         </p14:section>
-        <p14:section name="Gate" id="{fa85fe74-9fb0-58d4-8181-4df4ae5f5881}">
+        <p14:section name="Gate" id="{2b88a5e7-38eb-eb30-17af-28c7a6b8a5db}">
           <p14:sldIdLst>
             <p14:sldId id="257"/>
             <p14:sldId id="258"/>
           </p14:sldIdLst>
         </p14:section>
-        <p14:section name="Pre-teach" id="{844b5b4a-5ccb-fc62-aeb4-f1651ce5d4c2}">
+        <p14:section name="Pre-teach" id="{7b25e053-9a79-114a-4d2e-3d983923ac3b}">
           <p14:sldIdLst>
             <p14:sldId id="259"/>
             <p14:sldId id="260"/>
           </p14:sldIdLst>
         </p14:section>
-        <p14:section name="Read-along" id="{d6de9658-14f8-56a6-6f3b-1acc7775ca20}">
+        <p14:section name="Read-along" id="{b802511d-ff47-3423-48d1-d6416f97c6e7}">
           <p14:sldIdLst>
             <p14:sldId id="261"/>
             <p14:sldId id="262"/>
           </p14:sldIdLst>
         </p14:section>
-        <p14:section name="Teach" id="{2a441dcf-608e-b54e-fe16-657098b3f279}">
+        <p14:section name="Teach" id="{80a79905-0e80-1502-edd4-d0e10596aea0}">
           <p14:sldIdLst>
             <p14:sldId id="263"/>
             <p14:sldId id="264"/>
@@ -162,7 +162,7 @@
             <p14:sldId id="268"/>
           </p14:sldIdLst>
         </p14:section>
-        <p14:section name="Routes" id="{86161823-64df-6ece-f399-c1145ecf5f1f}">
+        <p14:section name="Routes" id="{79f0f3b3-5d05-ffda-7df4-cab547fea1d9}">
           <p14:sldIdLst>
             <p14:sldId id="269"/>
             <p14:sldId id="270"/>
@@ -172,12 +172,12 @@
             <p14:sldId id="274"/>
           </p14:sldIdLst>
         </p14:section>
-        <p14:section name="Close" id="{c763771d-7920-ed40-af49-0ec69d4f3868}">
+        <p14:section name="Close" id="{33f89067-0b54-704b-4b58-c7bb8571d2ee}">
           <p14:sldIdLst>
             <p14:sldId id="275"/>
           </p14:sldIdLst>
         </p14:section>
-        <p14:section name="Answers" id="{ceb2ea55-349d-5391-ef6d-2e4c797f6747}">
+        <p14:section name="Answers" id="{5ef05aa0-f0bd-0e84-b84f-d045711080a2}">
           <p14:sldIdLst>
             <p14:sldId id="276"/>
             <p14:sldId id="277"/>
